--- a/git충돌_과제.pptx
+++ b/git충돌_과제.pptx
@@ -5,12 +5,13 @@
     <p:sldMasterId id="2147483648" r:id="rId1"/>
   </p:sldMasterIdLst>
   <p:sldIdLst>
-    <p:sldId id="256" r:id="rId2"/>
-    <p:sldId id="257" r:id="rId3"/>
-    <p:sldId id="260" r:id="rId4"/>
-    <p:sldId id="258" r:id="rId5"/>
-    <p:sldId id="259" r:id="rId6"/>
-    <p:sldId id="261" r:id="rId7"/>
+    <p:sldId id="262" r:id="rId2"/>
+    <p:sldId id="256" r:id="rId3"/>
+    <p:sldId id="257" r:id="rId4"/>
+    <p:sldId id="260" r:id="rId5"/>
+    <p:sldId id="258" r:id="rId6"/>
+    <p:sldId id="259" r:id="rId7"/>
+    <p:sldId id="261" r:id="rId8"/>
   </p:sldIdLst>
   <p:sldSz cx="12192000" cy="6858000"/>
   <p:notesSz cx="6858000" cy="9144000"/>
@@ -109,6 +110,11 @@
       </a:defRPr>
     </a:lvl9pPr>
   </p:defaultTextStyle>
+  <p:extLst>
+    <p:ext uri="{EFAFB233-063F-42B5-8137-9DF3F51BA10A}">
+      <p15:sldGuideLst xmlns:p15="http://schemas.microsoft.com/office/powerpoint/2012/main"/>
+    </p:ext>
+  </p:extLst>
 </p:presentation>
 </file>
 
@@ -3326,99 +3332,22 @@
           <a:chExt cx="0" cy="0"/>
         </a:xfrm>
       </p:grpSpPr>
-      <p:pic>
-        <p:nvPicPr>
-          <p:cNvPr id="5" name="그림 4">
-            <a:extLst>
-              <a:ext uri="{FF2B5EF4-FFF2-40B4-BE49-F238E27FC236}">
-                <a16:creationId xmlns:a16="http://schemas.microsoft.com/office/drawing/2014/main" id="{9C267AA6-1FED-4E2D-8028-CC705C6BBE35}"/>
-              </a:ext>
-            </a:extLst>
-          </p:cNvPr>
-          <p:cNvPicPr>
-            <a:picLocks noChangeAspect="1"/>
-          </p:cNvPicPr>
+      <p:sp>
+        <p:nvSpPr>
+          <p:cNvPr id="4" name="TextBox 3">
+            <a:extLst>
+              <a:ext uri="{FF2B5EF4-FFF2-40B4-BE49-F238E27FC236}">
+                <a16:creationId xmlns:a16="http://schemas.microsoft.com/office/drawing/2014/main" id="{2CDCFF1F-82BF-4D42-8597-9913474C20BC}"/>
+              </a:ext>
+            </a:extLst>
+          </p:cNvPr>
+          <p:cNvSpPr txBox="1"/>
           <p:nvPr/>
-        </p:nvPicPr>
-        <p:blipFill rotWithShape="1">
-          <a:blip r:embed="rId2"/>
-          <a:srcRect t="13399" b="21021"/>
-          <a:stretch/>
-        </p:blipFill>
+        </p:nvSpPr>
         <p:spPr>
           <a:xfrm>
-            <a:off x="245746" y="1881568"/>
-            <a:ext cx="11364911" cy="1311966"/>
-          </a:xfrm>
-          <a:prstGeom prst="rect">
-            <a:avLst/>
-          </a:prstGeom>
-        </p:spPr>
-      </p:pic>
-      <p:sp>
-        <p:nvSpPr>
-          <p:cNvPr id="6" name="TextBox 5">
-            <a:extLst>
-              <a:ext uri="{FF2B5EF4-FFF2-40B4-BE49-F238E27FC236}">
-                <a16:creationId xmlns:a16="http://schemas.microsoft.com/office/drawing/2014/main" id="{24CD0D33-0B4E-4303-BFEB-0B189357D464}"/>
-              </a:ext>
-            </a:extLst>
-          </p:cNvPr>
-          <p:cNvSpPr txBox="1"/>
-          <p:nvPr/>
-        </p:nvSpPr>
-        <p:spPr>
-          <a:xfrm>
-            <a:off x="26504" y="26504"/>
-            <a:ext cx="4527073" cy="523220"/>
-          </a:xfrm>
-          <a:prstGeom prst="rect">
-            <a:avLst/>
-          </a:prstGeom>
-          <a:noFill/>
-          <a:ln w="31750">
-            <a:solidFill>
-              <a:schemeClr val="tx1"/>
-            </a:solidFill>
-          </a:ln>
-        </p:spPr>
-        <p:txBody>
-          <a:bodyPr wrap="none" rtlCol="0">
-            <a:spAutoFit/>
-          </a:bodyPr>
-          <a:lstStyle/>
-          <a:p>
-            <a:r>
-              <a:rPr lang="ko-KR" altLang="en-US" sz="2800" b="1" dirty="0"/>
-              <a:t>첫번째 </a:t>
-            </a:r>
-            <a:r>
-              <a:rPr lang="en-US" altLang="ko-KR" sz="2800" b="1" dirty="0"/>
-              <a:t>merge </a:t>
-            </a:r>
-            <a:r>
-              <a:rPr lang="ko-KR" altLang="en-US" sz="2800" b="1" dirty="0"/>
-              <a:t>충돌 테스트</a:t>
-            </a:r>
-          </a:p>
-        </p:txBody>
-      </p:sp>
-      <p:sp>
-        <p:nvSpPr>
-          <p:cNvPr id="7" name="TextBox 6">
-            <a:extLst>
-              <a:ext uri="{FF2B5EF4-FFF2-40B4-BE49-F238E27FC236}">
-                <a16:creationId xmlns:a16="http://schemas.microsoft.com/office/drawing/2014/main" id="{6594F77F-F40D-4B58-B7FA-A5E73C833CB0}"/>
-              </a:ext>
-            </a:extLst>
-          </p:cNvPr>
-          <p:cNvSpPr txBox="1"/>
-          <p:nvPr/>
-        </p:nvSpPr>
-        <p:spPr>
-          <a:xfrm>
-            <a:off x="344557" y="3429000"/>
-            <a:ext cx="5496313" cy="369332"/>
+            <a:off x="4163525" y="2628781"/>
+            <a:ext cx="3864949" cy="1600438"/>
           </a:xfrm>
           <a:prstGeom prst="rect">
             <a:avLst/>
@@ -3426,55 +3355,60 @@
           <a:noFill/>
         </p:spPr>
         <p:txBody>
-          <a:bodyPr wrap="none" rtlCol="0">
+          <a:bodyPr wrap="square" rtlCol="0">
             <a:spAutoFit/>
           </a:bodyPr>
           <a:lstStyle/>
           <a:p>
-            <a:r>
-              <a:rPr lang="en-US" altLang="ko-KR" b="1" dirty="0"/>
-              <a:t>dev/a </a:t>
-            </a:r>
-            <a:r>
-              <a:rPr lang="ko-KR" altLang="en-US" b="1" dirty="0" err="1"/>
-              <a:t>브렌치를</a:t>
-            </a:r>
-            <a:r>
-              <a:rPr lang="ko-KR" altLang="en-US" b="1" dirty="0"/>
+            <a:pPr algn="ctr"/>
+            <a:r>
+              <a:rPr lang="en-US" altLang="ko-KR" sz="4000" b="1" dirty="0"/>
+              <a:t>Git</a:t>
+            </a:r>
+            <a:r>
+              <a:rPr lang="ko-KR" altLang="en-US" sz="4000" b="1" dirty="0"/>
+              <a:t> 과제 </a:t>
+            </a:r>
+            <a:endParaRPr lang="en-US" altLang="ko-KR" sz="4000" b="1" dirty="0"/>
+          </a:p>
+          <a:p>
+            <a:pPr algn="ctr"/>
+            <a:endParaRPr lang="en-US" altLang="ko-KR" sz="4000" b="1" dirty="0"/>
+          </a:p>
+          <a:p>
+            <a:pPr algn="ctr"/>
+            <a:r>
+              <a:rPr lang="ko-KR" altLang="en-US" dirty="0"/>
+              <a:t>팀원 </a:t>
+            </a:r>
+            <a:r>
+              <a:rPr lang="en-US" altLang="ko-KR" dirty="0"/>
+              <a:t>: </a:t>
+            </a:r>
+            <a:r>
+              <a:rPr lang="ko-KR" altLang="en-US" dirty="0"/>
+              <a:t>정진관 박성현 </a:t>
+            </a:r>
+            <a:r>
+              <a:rPr lang="ko-KR" altLang="en-US" dirty="0" err="1"/>
+              <a:t>장주혁</a:t>
+            </a:r>
+            <a:r>
+              <a:rPr lang="ko-KR" altLang="en-US" dirty="0"/>
               <a:t> </a:t>
             </a:r>
             <a:r>
-              <a:rPr lang="en-US" altLang="ko-KR" b="1" dirty="0"/>
-              <a:t>merge</a:t>
-            </a:r>
-            <a:r>
-              <a:rPr lang="ko-KR" altLang="en-US" b="1" dirty="0"/>
-              <a:t> 한 뒤 </a:t>
-            </a:r>
-            <a:r>
-              <a:rPr lang="en-US" altLang="ko-KR" b="1" dirty="0"/>
-              <a:t>dev/b </a:t>
-            </a:r>
-            <a:r>
-              <a:rPr lang="ko-KR" altLang="en-US" b="1" dirty="0" err="1"/>
-              <a:t>브렌치</a:t>
-            </a:r>
-            <a:r>
-              <a:rPr lang="ko-KR" altLang="en-US" b="1" dirty="0"/>
-              <a:t> </a:t>
-            </a:r>
-            <a:r>
-              <a:rPr lang="en-US" altLang="ko-KR" b="1" dirty="0"/>
-              <a:t>merge</a:t>
-            </a:r>
-            <a:endParaRPr lang="ko-KR" altLang="en-US" b="1" dirty="0"/>
+              <a:rPr lang="ko-KR" altLang="en-US" dirty="0" err="1"/>
+              <a:t>강창록</a:t>
+            </a:r>
+            <a:endParaRPr lang="ko-KR" altLang="en-US" dirty="0"/>
           </a:p>
         </p:txBody>
       </p:sp>
     </p:spTree>
     <p:extLst>
       <p:ext uri="{BB962C8B-B14F-4D97-AF65-F5344CB8AC3E}">
-        <p14:creationId xmlns:p14="http://schemas.microsoft.com/office/powerpoint/2010/main" val="2163648722"/>
+        <p14:creationId xmlns:p14="http://schemas.microsoft.com/office/powerpoint/2010/main" val="475202030"/>
       </p:ext>
     </p:extLst>
   </p:cSld>
@@ -3503,10 +3437,10 @@
       </p:grpSpPr>
       <p:pic>
         <p:nvPicPr>
-          <p:cNvPr id="3" name="그림 2">
-            <a:extLst>
-              <a:ext uri="{FF2B5EF4-FFF2-40B4-BE49-F238E27FC236}">
-                <a16:creationId xmlns:a16="http://schemas.microsoft.com/office/drawing/2014/main" id="{F2AD6AB7-10E3-4EB9-A9D3-A9E7437F2DAC}"/>
+          <p:cNvPr id="5" name="그림 4">
+            <a:extLst>
+              <a:ext uri="{FF2B5EF4-FFF2-40B4-BE49-F238E27FC236}">
+                <a16:creationId xmlns:a16="http://schemas.microsoft.com/office/drawing/2014/main" id="{9C267AA6-1FED-4E2D-8028-CC705C6BBE35}"/>
               </a:ext>
             </a:extLst>
           </p:cNvPr>
@@ -3517,54 +3451,25 @@
         </p:nvPicPr>
         <p:blipFill rotWithShape="1">
           <a:blip r:embed="rId2"/>
-          <a:srcRect r="48852"/>
+          <a:srcRect t="13399" b="21021"/>
           <a:stretch/>
         </p:blipFill>
         <p:spPr>
           <a:xfrm>
-            <a:off x="947410" y="1285829"/>
-            <a:ext cx="3824945" cy="3296110"/>
+            <a:off x="245746" y="1881568"/>
+            <a:ext cx="11364911" cy="1311966"/>
           </a:xfrm>
           <a:prstGeom prst="rect">
             <a:avLst/>
           </a:prstGeom>
         </p:spPr>
       </p:pic>
-      <p:pic>
-        <p:nvPicPr>
-          <p:cNvPr id="6" name="그림 5">
-            <a:extLst>
-              <a:ext uri="{FF2B5EF4-FFF2-40B4-BE49-F238E27FC236}">
-                <a16:creationId xmlns:a16="http://schemas.microsoft.com/office/drawing/2014/main" id="{B83CC4A6-D482-498D-BD4B-CCC6AED871BB}"/>
-              </a:ext>
-            </a:extLst>
-          </p:cNvPr>
-          <p:cNvPicPr>
-            <a:picLocks noChangeAspect="1"/>
-          </p:cNvPicPr>
-          <p:nvPr/>
-        </p:nvPicPr>
-        <p:blipFill rotWithShape="1">
-          <a:blip r:embed="rId3"/>
-          <a:srcRect r="18402"/>
-          <a:stretch/>
-        </p:blipFill>
-        <p:spPr>
-          <a:xfrm>
-            <a:off x="6096000" y="1285829"/>
-            <a:ext cx="3979913" cy="2010056"/>
-          </a:xfrm>
-          <a:prstGeom prst="rect">
-            <a:avLst/>
-          </a:prstGeom>
-        </p:spPr>
-      </p:pic>
-      <p:sp>
-        <p:nvSpPr>
-          <p:cNvPr id="7" name="TextBox 6">
-            <a:extLst>
-              <a:ext uri="{FF2B5EF4-FFF2-40B4-BE49-F238E27FC236}">
-                <a16:creationId xmlns:a16="http://schemas.microsoft.com/office/drawing/2014/main" id="{F65DC2C1-471A-4532-801B-C6499CE2DCD3}"/>
+      <p:sp>
+        <p:nvSpPr>
+          <p:cNvPr id="6" name="TextBox 5">
+            <a:extLst>
+              <a:ext uri="{FF2B5EF4-FFF2-40B4-BE49-F238E27FC236}">
+                <a16:creationId xmlns:a16="http://schemas.microsoft.com/office/drawing/2014/main" id="{24CD0D33-0B4E-4303-BFEB-0B189357D464}"/>
               </a:ext>
             </a:extLst>
           </p:cNvPr>
@@ -3609,10 +3514,10 @@
       </p:sp>
       <p:sp>
         <p:nvSpPr>
-          <p:cNvPr id="8" name="TextBox 7">
-            <a:extLst>
-              <a:ext uri="{FF2B5EF4-FFF2-40B4-BE49-F238E27FC236}">
-                <a16:creationId xmlns:a16="http://schemas.microsoft.com/office/drawing/2014/main" id="{71E4ABC2-D2BB-4370-A6C3-B0BF7AD00154}"/>
+          <p:cNvPr id="7" name="TextBox 6">
+            <a:extLst>
+              <a:ext uri="{FF2B5EF4-FFF2-40B4-BE49-F238E27FC236}">
+                <a16:creationId xmlns:a16="http://schemas.microsoft.com/office/drawing/2014/main" id="{6594F77F-F40D-4B58-B7FA-A5E73C833CB0}"/>
               </a:ext>
             </a:extLst>
           </p:cNvPr>
@@ -3621,8 +3526,8 @@
         </p:nvSpPr>
         <p:spPr>
           <a:xfrm>
-            <a:off x="947410" y="4948712"/>
-            <a:ext cx="5710218" cy="369332"/>
+            <a:off x="344557" y="3429000"/>
+            <a:ext cx="5496313" cy="369332"/>
           </a:xfrm>
           <a:prstGeom prst="rect">
             <a:avLst/>
@@ -3641,27 +3546,44 @@
             </a:r>
             <a:r>
               <a:rPr lang="ko-KR" altLang="en-US" b="1" dirty="0" err="1"/>
-              <a:t>브렌치의</a:t>
+              <a:t>브렌치를</a:t>
             </a:r>
             <a:r>
               <a:rPr lang="ko-KR" altLang="en-US" b="1" dirty="0"/>
-              <a:t> 내용을 남기고 </a:t>
+              <a:t> </a:t>
             </a:r>
             <a:r>
               <a:rPr lang="en-US" altLang="ko-KR" b="1" dirty="0"/>
-              <a:t>dev/b</a:t>
+              <a:t>merge</a:t>
             </a:r>
             <a:r>
               <a:rPr lang="ko-KR" altLang="en-US" b="1" dirty="0"/>
-              <a:t>의 내용은 삭제</a:t>
-            </a:r>
+              <a:t> 한 뒤 </a:t>
+            </a:r>
+            <a:r>
+              <a:rPr lang="en-US" altLang="ko-KR" b="1" dirty="0"/>
+              <a:t>dev/b </a:t>
+            </a:r>
+            <a:r>
+              <a:rPr lang="ko-KR" altLang="en-US" b="1" dirty="0" err="1"/>
+              <a:t>브렌치</a:t>
+            </a:r>
+            <a:r>
+              <a:rPr lang="ko-KR" altLang="en-US" b="1" dirty="0"/>
+              <a:t> </a:t>
+            </a:r>
+            <a:r>
+              <a:rPr lang="en-US" altLang="ko-KR" b="1" dirty="0"/>
+              <a:t>merge</a:t>
+            </a:r>
+            <a:endParaRPr lang="ko-KR" altLang="en-US" b="1" dirty="0"/>
           </a:p>
         </p:txBody>
       </p:sp>
     </p:spTree>
     <p:extLst>
       <p:ext uri="{BB962C8B-B14F-4D97-AF65-F5344CB8AC3E}">
-        <p14:creationId xmlns:p14="http://schemas.microsoft.com/office/powerpoint/2010/main" val="2708505809"/>
+        <p14:creationId xmlns:p14="http://schemas.microsoft.com/office/powerpoint/2010/main" val="2163648722"/>
       </p:ext>
     </p:extLst>
   </p:cSld>
@@ -3690,10 +3612,10 @@
       </p:grpSpPr>
       <p:pic>
         <p:nvPicPr>
-          <p:cNvPr id="5" name="그림 4">
-            <a:extLst>
-              <a:ext uri="{FF2B5EF4-FFF2-40B4-BE49-F238E27FC236}">
-                <a16:creationId xmlns:a16="http://schemas.microsoft.com/office/drawing/2014/main" id="{18F20527-0284-4C21-B2E0-203F82FEDC59}"/>
+          <p:cNvPr id="3" name="그림 2">
+            <a:extLst>
+              <a:ext uri="{FF2B5EF4-FFF2-40B4-BE49-F238E27FC236}">
+                <a16:creationId xmlns:a16="http://schemas.microsoft.com/office/drawing/2014/main" id="{F2AD6AB7-10E3-4EB9-A9D3-A9E7437F2DAC}"/>
               </a:ext>
             </a:extLst>
           </p:cNvPr>
@@ -3702,28 +3624,56 @@
           </p:cNvPicPr>
           <p:nvPr/>
         </p:nvPicPr>
-        <p:blipFill>
+        <p:blipFill rotWithShape="1">
           <a:blip r:embed="rId2"/>
-          <a:stretch>
-            <a:fillRect/>
-          </a:stretch>
+          <a:srcRect r="48852"/>
+          <a:stretch/>
         </p:blipFill>
         <p:spPr>
           <a:xfrm>
-            <a:off x="344557" y="1179624"/>
-            <a:ext cx="10288436" cy="1619476"/>
+            <a:off x="947410" y="1285829"/>
+            <a:ext cx="3824945" cy="3296110"/>
           </a:xfrm>
           <a:prstGeom prst="rect">
             <a:avLst/>
           </a:prstGeom>
         </p:spPr>
       </p:pic>
-      <p:sp>
-        <p:nvSpPr>
-          <p:cNvPr id="6" name="TextBox 5">
-            <a:extLst>
-              <a:ext uri="{FF2B5EF4-FFF2-40B4-BE49-F238E27FC236}">
-                <a16:creationId xmlns:a16="http://schemas.microsoft.com/office/drawing/2014/main" id="{C9AD8612-4303-4A13-A495-E7E158CBC1E7}"/>
+      <p:pic>
+        <p:nvPicPr>
+          <p:cNvPr id="6" name="그림 5">
+            <a:extLst>
+              <a:ext uri="{FF2B5EF4-FFF2-40B4-BE49-F238E27FC236}">
+                <a16:creationId xmlns:a16="http://schemas.microsoft.com/office/drawing/2014/main" id="{B83CC4A6-D482-498D-BD4B-CCC6AED871BB}"/>
+              </a:ext>
+            </a:extLst>
+          </p:cNvPr>
+          <p:cNvPicPr>
+            <a:picLocks noChangeAspect="1"/>
+          </p:cNvPicPr>
+          <p:nvPr/>
+        </p:nvPicPr>
+        <p:blipFill rotWithShape="1">
+          <a:blip r:embed="rId3"/>
+          <a:srcRect r="18402"/>
+          <a:stretch/>
+        </p:blipFill>
+        <p:spPr>
+          <a:xfrm>
+            <a:off x="6096000" y="1285829"/>
+            <a:ext cx="3979913" cy="2010056"/>
+          </a:xfrm>
+          <a:prstGeom prst="rect">
+            <a:avLst/>
+          </a:prstGeom>
+        </p:spPr>
+      </p:pic>
+      <p:sp>
+        <p:nvSpPr>
+          <p:cNvPr id="7" name="TextBox 6">
+            <a:extLst>
+              <a:ext uri="{FF2B5EF4-FFF2-40B4-BE49-F238E27FC236}">
+                <a16:creationId xmlns:a16="http://schemas.microsoft.com/office/drawing/2014/main" id="{F65DC2C1-471A-4532-801B-C6499CE2DCD3}"/>
               </a:ext>
             </a:extLst>
           </p:cNvPr>
@@ -3753,7 +3703,7 @@
           <a:p>
             <a:r>
               <a:rPr lang="ko-KR" altLang="en-US" sz="2800" b="1" dirty="0"/>
-              <a:t>두번째 </a:t>
+              <a:t>첫번째 </a:t>
             </a:r>
             <a:r>
               <a:rPr lang="en-US" altLang="ko-KR" sz="2800" b="1" dirty="0"/>
@@ -3768,10 +3718,10 @@
       </p:sp>
       <p:sp>
         <p:nvSpPr>
-          <p:cNvPr id="7" name="TextBox 6">
-            <a:extLst>
-              <a:ext uri="{FF2B5EF4-FFF2-40B4-BE49-F238E27FC236}">
-                <a16:creationId xmlns:a16="http://schemas.microsoft.com/office/drawing/2014/main" id="{EE18B366-0A10-4DF8-8382-C4A76D97AFF2}"/>
+          <p:cNvPr id="8" name="TextBox 7">
+            <a:extLst>
+              <a:ext uri="{FF2B5EF4-FFF2-40B4-BE49-F238E27FC236}">
+                <a16:creationId xmlns:a16="http://schemas.microsoft.com/office/drawing/2014/main" id="{71E4ABC2-D2BB-4370-A6C3-B0BF7AD00154}"/>
               </a:ext>
             </a:extLst>
           </p:cNvPr>
@@ -3780,8 +3730,8 @@
         </p:nvSpPr>
         <p:spPr>
           <a:xfrm>
-            <a:off x="344557" y="3397454"/>
-            <a:ext cx="5512343" cy="369332"/>
+            <a:off x="947410" y="4948712"/>
+            <a:ext cx="5710218" cy="369332"/>
           </a:xfrm>
           <a:prstGeom prst="rect">
             <a:avLst/>
@@ -3796,48 +3746,31 @@
           <a:p>
             <a:r>
               <a:rPr lang="en-US" altLang="ko-KR" b="1" dirty="0"/>
-              <a:t>dev/b </a:t>
+              <a:t>dev/a </a:t>
             </a:r>
             <a:r>
               <a:rPr lang="ko-KR" altLang="en-US" b="1" dirty="0" err="1"/>
-              <a:t>브렌치를</a:t>
+              <a:t>브렌치의</a:t>
             </a:r>
             <a:r>
               <a:rPr lang="ko-KR" altLang="en-US" b="1" dirty="0"/>
-              <a:t> </a:t>
+              <a:t> 내용을 남기고 </a:t>
             </a:r>
             <a:r>
               <a:rPr lang="en-US" altLang="ko-KR" b="1" dirty="0"/>
-              <a:t>merge</a:t>
+              <a:t>dev/b</a:t>
             </a:r>
             <a:r>
               <a:rPr lang="ko-KR" altLang="en-US" b="1" dirty="0"/>
-              <a:t> 한 뒤 </a:t>
-            </a:r>
-            <a:r>
-              <a:rPr lang="en-US" altLang="ko-KR" b="1" dirty="0"/>
-              <a:t>dev/c </a:t>
-            </a:r>
-            <a:r>
-              <a:rPr lang="ko-KR" altLang="en-US" b="1" dirty="0" err="1"/>
-              <a:t>브렌치</a:t>
-            </a:r>
-            <a:r>
-              <a:rPr lang="ko-KR" altLang="en-US" b="1" dirty="0"/>
-              <a:t> </a:t>
-            </a:r>
-            <a:r>
-              <a:rPr lang="en-US" altLang="ko-KR" b="1" dirty="0"/>
-              <a:t>merge</a:t>
-            </a:r>
-            <a:endParaRPr lang="ko-KR" altLang="en-US" b="1" dirty="0"/>
+              <a:t>의 내용은 삭제</a:t>
+            </a:r>
           </a:p>
         </p:txBody>
       </p:sp>
     </p:spTree>
     <p:extLst>
       <p:ext uri="{BB962C8B-B14F-4D97-AF65-F5344CB8AC3E}">
-        <p14:creationId xmlns:p14="http://schemas.microsoft.com/office/powerpoint/2010/main" val="1121606289"/>
+        <p14:creationId xmlns:p14="http://schemas.microsoft.com/office/powerpoint/2010/main" val="2708505809"/>
       </p:ext>
     </p:extLst>
   </p:cSld>
@@ -3869,7 +3802,7 @@
           <p:cNvPr id="5" name="그림 4">
             <a:extLst>
               <a:ext uri="{FF2B5EF4-FFF2-40B4-BE49-F238E27FC236}">
-                <a16:creationId xmlns:a16="http://schemas.microsoft.com/office/drawing/2014/main" id="{FDE989FF-982C-4657-81C9-F75D6C6012FC}"/>
+                <a16:creationId xmlns:a16="http://schemas.microsoft.com/office/drawing/2014/main" id="{18F20527-0284-4C21-B2E0-203F82FEDC59}"/>
               </a:ext>
             </a:extLst>
           </p:cNvPr>
@@ -3886,50 +3819,20 @@
         </p:blipFill>
         <p:spPr>
           <a:xfrm>
-            <a:off x="684368" y="1249181"/>
-            <a:ext cx="3696216" cy="3381847"/>
+            <a:off x="344557" y="1179624"/>
+            <a:ext cx="10288436" cy="1619476"/>
           </a:xfrm>
           <a:prstGeom prst="rect">
             <a:avLst/>
           </a:prstGeom>
         </p:spPr>
       </p:pic>
-      <p:pic>
-        <p:nvPicPr>
-          <p:cNvPr id="7" name="그림 6">
-            <a:extLst>
-              <a:ext uri="{FF2B5EF4-FFF2-40B4-BE49-F238E27FC236}">
-                <a16:creationId xmlns:a16="http://schemas.microsoft.com/office/drawing/2014/main" id="{3B4FCE2B-9607-4099-BFF0-2547BF97E703}"/>
-              </a:ext>
-            </a:extLst>
-          </p:cNvPr>
-          <p:cNvPicPr>
-            <a:picLocks noChangeAspect="1"/>
-          </p:cNvPicPr>
-          <p:nvPr/>
-        </p:nvPicPr>
-        <p:blipFill>
-          <a:blip r:embed="rId3"/>
-          <a:stretch>
-            <a:fillRect/>
-          </a:stretch>
-        </p:blipFill>
-        <p:spPr>
-          <a:xfrm>
-            <a:off x="5415586" y="1249181"/>
-            <a:ext cx="2924583" cy="1895740"/>
-          </a:xfrm>
-          <a:prstGeom prst="rect">
-            <a:avLst/>
-          </a:prstGeom>
-        </p:spPr>
-      </p:pic>
-      <p:sp>
-        <p:nvSpPr>
-          <p:cNvPr id="8" name="TextBox 7">
-            <a:extLst>
-              <a:ext uri="{FF2B5EF4-FFF2-40B4-BE49-F238E27FC236}">
-                <a16:creationId xmlns:a16="http://schemas.microsoft.com/office/drawing/2014/main" id="{EDB8D357-5871-415E-9D1B-B45515C9D7AB}"/>
+      <p:sp>
+        <p:nvSpPr>
+          <p:cNvPr id="6" name="TextBox 5">
+            <a:extLst>
+              <a:ext uri="{FF2B5EF4-FFF2-40B4-BE49-F238E27FC236}">
+                <a16:creationId xmlns:a16="http://schemas.microsoft.com/office/drawing/2014/main" id="{C9AD8612-4303-4A13-A495-E7E158CBC1E7}"/>
               </a:ext>
             </a:extLst>
           </p:cNvPr>
@@ -3974,10 +3877,10 @@
       </p:sp>
       <p:sp>
         <p:nvSpPr>
-          <p:cNvPr id="9" name="TextBox 8">
-            <a:extLst>
-              <a:ext uri="{FF2B5EF4-FFF2-40B4-BE49-F238E27FC236}">
-                <a16:creationId xmlns:a16="http://schemas.microsoft.com/office/drawing/2014/main" id="{2B832A4C-B916-4E09-8883-81A53E5E8E83}"/>
+          <p:cNvPr id="7" name="TextBox 6">
+            <a:extLst>
+              <a:ext uri="{FF2B5EF4-FFF2-40B4-BE49-F238E27FC236}">
+                <a16:creationId xmlns:a16="http://schemas.microsoft.com/office/drawing/2014/main" id="{EE18B366-0A10-4DF8-8382-C4A76D97AFF2}"/>
               </a:ext>
             </a:extLst>
           </p:cNvPr>
@@ -3986,8 +3889,8 @@
         </p:nvSpPr>
         <p:spPr>
           <a:xfrm>
-            <a:off x="684368" y="4923868"/>
-            <a:ext cx="4230645" cy="369332"/>
+            <a:off x="344557" y="3397454"/>
+            <a:ext cx="5512343" cy="369332"/>
           </a:xfrm>
           <a:prstGeom prst="rect">
             <a:avLst/>
@@ -4002,27 +3905,48 @@
           <a:p>
             <a:r>
               <a:rPr lang="en-US" altLang="ko-KR" b="1" dirty="0"/>
-              <a:t>dev/c</a:t>
+              <a:t>dev/b </a:t>
+            </a:r>
+            <a:r>
+              <a:rPr lang="ko-KR" altLang="en-US" b="1" dirty="0" err="1"/>
+              <a:t>브렌치를</a:t>
             </a:r>
             <a:r>
               <a:rPr lang="ko-KR" altLang="en-US" b="1" dirty="0"/>
-              <a:t> 내용을 남기고 </a:t>
+              <a:t> </a:t>
             </a:r>
             <a:r>
               <a:rPr lang="en-US" altLang="ko-KR" b="1" dirty="0"/>
-              <a:t>dev/b </a:t>
+              <a:t>merge</a:t>
             </a:r>
             <a:r>
               <a:rPr lang="ko-KR" altLang="en-US" b="1" dirty="0"/>
-              <a:t>내용 삭제</a:t>
-            </a:r>
+              <a:t> 한 뒤 </a:t>
+            </a:r>
+            <a:r>
+              <a:rPr lang="en-US" altLang="ko-KR" b="1" dirty="0"/>
+              <a:t>dev/c </a:t>
+            </a:r>
+            <a:r>
+              <a:rPr lang="ko-KR" altLang="en-US" b="1" dirty="0" err="1"/>
+              <a:t>브렌치</a:t>
+            </a:r>
+            <a:r>
+              <a:rPr lang="ko-KR" altLang="en-US" b="1" dirty="0"/>
+              <a:t> </a:t>
+            </a:r>
+            <a:r>
+              <a:rPr lang="en-US" altLang="ko-KR" b="1" dirty="0"/>
+              <a:t>merge</a:t>
+            </a:r>
+            <a:endParaRPr lang="ko-KR" altLang="en-US" b="1" dirty="0"/>
           </a:p>
         </p:txBody>
       </p:sp>
     </p:spTree>
     <p:extLst>
       <p:ext uri="{BB962C8B-B14F-4D97-AF65-F5344CB8AC3E}">
-        <p14:creationId xmlns:p14="http://schemas.microsoft.com/office/powerpoint/2010/main" val="4094417069"/>
+        <p14:creationId xmlns:p14="http://schemas.microsoft.com/office/powerpoint/2010/main" val="1121606289"/>
       </p:ext>
     </p:extLst>
   </p:cSld>
@@ -4051,6 +3975,191 @@
       </p:grpSpPr>
       <p:pic>
         <p:nvPicPr>
+          <p:cNvPr id="5" name="그림 4">
+            <a:extLst>
+              <a:ext uri="{FF2B5EF4-FFF2-40B4-BE49-F238E27FC236}">
+                <a16:creationId xmlns:a16="http://schemas.microsoft.com/office/drawing/2014/main" id="{FDE989FF-982C-4657-81C9-F75D6C6012FC}"/>
+              </a:ext>
+            </a:extLst>
+          </p:cNvPr>
+          <p:cNvPicPr>
+            <a:picLocks noChangeAspect="1"/>
+          </p:cNvPicPr>
+          <p:nvPr/>
+        </p:nvPicPr>
+        <p:blipFill>
+          <a:blip r:embed="rId2"/>
+          <a:stretch>
+            <a:fillRect/>
+          </a:stretch>
+        </p:blipFill>
+        <p:spPr>
+          <a:xfrm>
+            <a:off x="684368" y="1249181"/>
+            <a:ext cx="3696216" cy="3381847"/>
+          </a:xfrm>
+          <a:prstGeom prst="rect">
+            <a:avLst/>
+          </a:prstGeom>
+        </p:spPr>
+      </p:pic>
+      <p:pic>
+        <p:nvPicPr>
+          <p:cNvPr id="7" name="그림 6">
+            <a:extLst>
+              <a:ext uri="{FF2B5EF4-FFF2-40B4-BE49-F238E27FC236}">
+                <a16:creationId xmlns:a16="http://schemas.microsoft.com/office/drawing/2014/main" id="{3B4FCE2B-9607-4099-BFF0-2547BF97E703}"/>
+              </a:ext>
+            </a:extLst>
+          </p:cNvPr>
+          <p:cNvPicPr>
+            <a:picLocks noChangeAspect="1"/>
+          </p:cNvPicPr>
+          <p:nvPr/>
+        </p:nvPicPr>
+        <p:blipFill>
+          <a:blip r:embed="rId3"/>
+          <a:stretch>
+            <a:fillRect/>
+          </a:stretch>
+        </p:blipFill>
+        <p:spPr>
+          <a:xfrm>
+            <a:off x="5415586" y="1249181"/>
+            <a:ext cx="2924583" cy="1895740"/>
+          </a:xfrm>
+          <a:prstGeom prst="rect">
+            <a:avLst/>
+          </a:prstGeom>
+        </p:spPr>
+      </p:pic>
+      <p:sp>
+        <p:nvSpPr>
+          <p:cNvPr id="8" name="TextBox 7">
+            <a:extLst>
+              <a:ext uri="{FF2B5EF4-FFF2-40B4-BE49-F238E27FC236}">
+                <a16:creationId xmlns:a16="http://schemas.microsoft.com/office/drawing/2014/main" id="{EDB8D357-5871-415E-9D1B-B45515C9D7AB}"/>
+              </a:ext>
+            </a:extLst>
+          </p:cNvPr>
+          <p:cNvSpPr txBox="1"/>
+          <p:nvPr/>
+        </p:nvSpPr>
+        <p:spPr>
+          <a:xfrm>
+            <a:off x="26504" y="26504"/>
+            <a:ext cx="4527073" cy="523220"/>
+          </a:xfrm>
+          <a:prstGeom prst="rect">
+            <a:avLst/>
+          </a:prstGeom>
+          <a:noFill/>
+          <a:ln w="31750">
+            <a:solidFill>
+              <a:schemeClr val="tx1"/>
+            </a:solidFill>
+          </a:ln>
+        </p:spPr>
+        <p:txBody>
+          <a:bodyPr wrap="none" rtlCol="0">
+            <a:spAutoFit/>
+          </a:bodyPr>
+          <a:lstStyle/>
+          <a:p>
+            <a:r>
+              <a:rPr lang="ko-KR" altLang="en-US" sz="2800" b="1" dirty="0"/>
+              <a:t>두번째 </a:t>
+            </a:r>
+            <a:r>
+              <a:rPr lang="en-US" altLang="ko-KR" sz="2800" b="1" dirty="0"/>
+              <a:t>merge </a:t>
+            </a:r>
+            <a:r>
+              <a:rPr lang="ko-KR" altLang="en-US" sz="2800" b="1" dirty="0"/>
+              <a:t>충돌 테스트</a:t>
+            </a:r>
+          </a:p>
+        </p:txBody>
+      </p:sp>
+      <p:sp>
+        <p:nvSpPr>
+          <p:cNvPr id="9" name="TextBox 8">
+            <a:extLst>
+              <a:ext uri="{FF2B5EF4-FFF2-40B4-BE49-F238E27FC236}">
+                <a16:creationId xmlns:a16="http://schemas.microsoft.com/office/drawing/2014/main" id="{2B832A4C-B916-4E09-8883-81A53E5E8E83}"/>
+              </a:ext>
+            </a:extLst>
+          </p:cNvPr>
+          <p:cNvSpPr txBox="1"/>
+          <p:nvPr/>
+        </p:nvSpPr>
+        <p:spPr>
+          <a:xfrm>
+            <a:off x="684368" y="4923868"/>
+            <a:ext cx="4230645" cy="369332"/>
+          </a:xfrm>
+          <a:prstGeom prst="rect">
+            <a:avLst/>
+          </a:prstGeom>
+          <a:noFill/>
+        </p:spPr>
+        <p:txBody>
+          <a:bodyPr wrap="none" rtlCol="0">
+            <a:spAutoFit/>
+          </a:bodyPr>
+          <a:lstStyle/>
+          <a:p>
+            <a:r>
+              <a:rPr lang="en-US" altLang="ko-KR" b="1" dirty="0"/>
+              <a:t>dev/c</a:t>
+            </a:r>
+            <a:r>
+              <a:rPr lang="ko-KR" altLang="en-US" b="1" dirty="0"/>
+              <a:t> 내용을 남기고 </a:t>
+            </a:r>
+            <a:r>
+              <a:rPr lang="en-US" altLang="ko-KR" b="1" dirty="0"/>
+              <a:t>dev/b </a:t>
+            </a:r>
+            <a:r>
+              <a:rPr lang="ko-KR" altLang="en-US" b="1" dirty="0"/>
+              <a:t>내용 삭제</a:t>
+            </a:r>
+          </a:p>
+        </p:txBody>
+      </p:sp>
+    </p:spTree>
+    <p:extLst>
+      <p:ext uri="{BB962C8B-B14F-4D97-AF65-F5344CB8AC3E}">
+        <p14:creationId xmlns:p14="http://schemas.microsoft.com/office/powerpoint/2010/main" val="4094417069"/>
+      </p:ext>
+    </p:extLst>
+  </p:cSld>
+  <p:clrMapOvr>
+    <a:masterClrMapping/>
+  </p:clrMapOvr>
+</p:sld>
+</file>
+
+<file path=ppt/slides/slide6.xml><?xml version="1.0" encoding="utf-8"?>
+<p:sld xmlns:a="http://schemas.openxmlformats.org/drawingml/2006/main" xmlns:r="http://schemas.openxmlformats.org/officeDocument/2006/relationships" xmlns:p="http://schemas.openxmlformats.org/presentationml/2006/main">
+  <p:cSld>
+    <p:spTree>
+      <p:nvGrpSpPr>
+        <p:cNvPr id="1" name=""/>
+        <p:cNvGrpSpPr/>
+        <p:nvPr/>
+      </p:nvGrpSpPr>
+      <p:grpSpPr>
+        <a:xfrm>
+          <a:off x="0" y="0"/>
+          <a:ext cx="0" cy="0"/>
+          <a:chOff x="0" y="0"/>
+          <a:chExt cx="0" cy="0"/>
+        </a:xfrm>
+      </p:grpSpPr>
+      <p:pic>
+        <p:nvPicPr>
           <p:cNvPr id="3" name="그림 2">
             <a:extLst>
               <a:ext uri="{FF2B5EF4-FFF2-40B4-BE49-F238E27FC236}">
@@ -4217,7 +4326,7 @@
 </p:sld>
 </file>
 
-<file path=ppt/slides/slide6.xml><?xml version="1.0" encoding="utf-8"?>
+<file path=ppt/slides/slide7.xml><?xml version="1.0" encoding="utf-8"?>
 <p:sld xmlns:a="http://schemas.openxmlformats.org/drawingml/2006/main" xmlns:r="http://schemas.openxmlformats.org/officeDocument/2006/relationships" xmlns:p="http://schemas.openxmlformats.org/presentationml/2006/main">
   <p:cSld>
     <p:spTree>
